--- a/exports/pptx/lessons/primary-module-03-ayurveda-good-health/day-06-sleep.pptx
+++ b/exports/pptx/lessons/primary-module-03-ayurveda-good-health/day-06-sleep.pptx
@@ -14,9 +14,11 @@
     <p:sldId id="262" r:id="rId8"/>
     <p:sldId id="263" r:id="rId9"/>
     <p:sldId id="264" r:id="rId10"/>
+    <p:sldId id="265" r:id="rId11"/>
+    <p:sldId id="266" r:id="rId12"/>
   </p:sldIdLst>
   <p:notesMasterIdLst>
-    <p:notesMasterId r:id="rId11"/>
+    <p:notesMasterId r:id="rId13"/>
   </p:notesMasterIdLst>
   <p:sldSz cx="9144000" cy="5143500"/>
   <p:notesSz cx="5143500" cy="9144000"/>
@@ -534,6 +536,182 @@
             <a:fld id="{F7021451-1387-4CA6-816F-3879F97B5CBC}" type="slidenum">
               <a:rPr lang="en-US"/>
               <a:t>1</a:t>
+            </a:fld>
+            <a:endParaRPr lang="en-US"/>
+          </a:p>
+        </p:txBody>
+      </p:sp>
+    </p:spTree>
+    <p:extLst>
+      <p:ext uri="{BB962C8B-B14F-4D97-AF65-F5344CB8AC3E}">
+        <p14:creationId xmlns:p14="http://schemas.microsoft.com/office/powerpoint/2010/main" val="1024086991"/>
+      </p:ext>
+    </p:extLst>
+  </p:cSld>
+  <p:clrMapOvr>
+    <a:masterClrMapping/>
+  </p:clrMapOvr>
+</p:notes>
+</file>
+
+<file path=ppt/notesSlides/notesSlide10.xml><?xml version="1.0" encoding="utf-8"?>
+<p:notes xmlns:a="http://schemas.openxmlformats.org/drawingml/2006/main" xmlns:r="http://schemas.openxmlformats.org/officeDocument/2006/relationships" xmlns:p="http://schemas.openxmlformats.org/presentationml/2006/main">
+  <p:cSld>
+    <p:spTree>
+      <p:nvGrpSpPr>
+        <p:cNvPr id="1" name=""/>
+        <p:cNvGrpSpPr/>
+        <p:nvPr/>
+      </p:nvGrpSpPr>
+      <p:grpSpPr>
+        <a:xfrm>
+          <a:off x="0" y="0"/>
+          <a:ext cx="0" cy="0"/>
+          <a:chOff x="0" y="0"/>
+          <a:chExt cx="0" cy="0"/>
+        </a:xfrm>
+      </p:grpSpPr>
+      <p:sp>
+        <p:nvSpPr>
+          <p:cNvPr id="2" name="Slide Image Placeholder 1"/>
+          <p:cNvSpPr>
+            <a:spLocks noGrp="1" noRot="1" noChangeAspect="1"/>
+          </p:cNvSpPr>
+          <p:nvPr>
+            <p:ph type="sldImg"/>
+          </p:nvPr>
+        </p:nvSpPr>
+        <p:spPr/>
+      </p:sp>
+      <p:sp>
+        <p:nvSpPr>
+          <p:cNvPr id="3" name="Notes Placeholder 2"/>
+          <p:cNvSpPr>
+            <a:spLocks noGrp="1"/>
+          </p:cNvSpPr>
+          <p:nvPr>
+            <p:ph type="body" idx="1"/>
+          </p:nvPr>
+        </p:nvSpPr>
+        <p:spPr/>
+        <p:txBody>
+          <a:bodyPr/>
+          <a:lstStyle/>
+          <a:p>
+            <a:r>
+              <a:rPr lang="en-US" dirty="0"/>
+              <a:t/>
+            </a:r>
+            <a:endParaRPr lang="en-US" dirty="0"/>
+          </a:p>
+        </p:txBody>
+      </p:sp>
+      <p:sp>
+        <p:nvSpPr>
+          <p:cNvPr id="4" name="Slide Number Placeholder 3"/>
+          <p:cNvSpPr>
+            <a:spLocks noGrp="1"/>
+          </p:cNvSpPr>
+          <p:nvPr>
+            <p:ph type="sldNum" sz="quarter" idx="10"/>
+          </p:nvPr>
+        </p:nvSpPr>
+        <p:spPr/>
+        <p:txBody>
+          <a:bodyPr/>
+          <a:lstStyle/>
+          <a:p>
+            <a:fld id="{F7021451-1387-4CA6-816F-3879F97B5CBC}" type="slidenum">
+              <a:rPr lang="en-US"/>
+              <a:t>10</a:t>
+            </a:fld>
+            <a:endParaRPr lang="en-US"/>
+          </a:p>
+        </p:txBody>
+      </p:sp>
+    </p:spTree>
+    <p:extLst>
+      <p:ext uri="{BB962C8B-B14F-4D97-AF65-F5344CB8AC3E}">
+        <p14:creationId xmlns:p14="http://schemas.microsoft.com/office/powerpoint/2010/main" val="1024086991"/>
+      </p:ext>
+    </p:extLst>
+  </p:cSld>
+  <p:clrMapOvr>
+    <a:masterClrMapping/>
+  </p:clrMapOvr>
+</p:notes>
+</file>
+
+<file path=ppt/notesSlides/notesSlide11.xml><?xml version="1.0" encoding="utf-8"?>
+<p:notes xmlns:a="http://schemas.openxmlformats.org/drawingml/2006/main" xmlns:r="http://schemas.openxmlformats.org/officeDocument/2006/relationships" xmlns:p="http://schemas.openxmlformats.org/presentationml/2006/main">
+  <p:cSld>
+    <p:spTree>
+      <p:nvGrpSpPr>
+        <p:cNvPr id="1" name=""/>
+        <p:cNvGrpSpPr/>
+        <p:nvPr/>
+      </p:nvGrpSpPr>
+      <p:grpSpPr>
+        <a:xfrm>
+          <a:off x="0" y="0"/>
+          <a:ext cx="0" cy="0"/>
+          <a:chOff x="0" y="0"/>
+          <a:chExt cx="0" cy="0"/>
+        </a:xfrm>
+      </p:grpSpPr>
+      <p:sp>
+        <p:nvSpPr>
+          <p:cNvPr id="2" name="Slide Image Placeholder 1"/>
+          <p:cNvSpPr>
+            <a:spLocks noGrp="1" noRot="1" noChangeAspect="1"/>
+          </p:cNvSpPr>
+          <p:nvPr>
+            <p:ph type="sldImg"/>
+          </p:nvPr>
+        </p:nvSpPr>
+        <p:spPr/>
+      </p:sp>
+      <p:sp>
+        <p:nvSpPr>
+          <p:cNvPr id="3" name="Notes Placeholder 2"/>
+          <p:cNvSpPr>
+            <a:spLocks noGrp="1"/>
+          </p:cNvSpPr>
+          <p:nvPr>
+            <p:ph type="body" idx="1"/>
+          </p:nvPr>
+        </p:nvSpPr>
+        <p:spPr/>
+        <p:txBody>
+          <a:bodyPr/>
+          <a:lstStyle/>
+          <a:p>
+            <a:r>
+              <a:rPr lang="en-US" dirty="0"/>
+              <a:t/>
+            </a:r>
+            <a:endParaRPr lang="en-US" dirty="0"/>
+          </a:p>
+        </p:txBody>
+      </p:sp>
+      <p:sp>
+        <p:nvSpPr>
+          <p:cNvPr id="4" name="Slide Number Placeholder 3"/>
+          <p:cNvSpPr>
+            <a:spLocks noGrp="1"/>
+          </p:cNvSpPr>
+          <p:nvPr>
+            <p:ph type="sldNum" sz="quarter" idx="10"/>
+          </p:nvPr>
+        </p:nvSpPr>
+        <p:spPr/>
+        <p:txBody>
+          <a:bodyPr/>
+          <a:lstStyle/>
+          <a:p>
+            <a:fld id="{F7021451-1387-4CA6-816F-3879F97B5CBC}" type="slidenum">
+              <a:rPr lang="en-US"/>
+              <a:t>11</a:t>
             </a:fld>
             <a:endParaRPr lang="en-US"/>
           </a:p>
@@ -1787,7 +1965,117 @@
         </p:nvSpPr>
         <p:spPr>
           <a:xfrm>
-            <a:off x="406301" y="1223963"/>
+            <a:off x="406301" y="4434929"/>
+            <a:ext cx="8498026" cy="213271"/>
+          </a:xfrm>
+          <a:prstGeom prst="rect">
+            <a:avLst/>
+          </a:prstGeom>
+          <a:noFill/>
+          <a:ln/>
+        </p:spPr>
+        <p:txBody>
+          <a:bodyPr wrap="square" lIns="0" tIns="0" rIns="0" bIns="0" rtlCol="0" anchor="t"/>
+          <a:lstStyle/>
+          <a:p>
+            <a:pPr algn="l" indent="0" marL="0">
+              <a:lnSpc>
+                <a:spcPts val="1680"/>
+              </a:lnSpc>
+              <a:spcBef>
+                <a:spcPts val="300"/>
+              </a:spcBef>
+              <a:spcAft>
+                <a:spcPts val="300"/>
+              </a:spcAft>
+              <a:buNone/>
+            </a:pPr>
+            <a:r>
+              <a:rPr lang="en-US" sz="1200" dirty="0">
+                <a:solidFill>
+                  <a:srgbClr val="2C2C2C"/>
+                </a:solidFill>
+                <a:latin typeface="Verdana" pitchFamily="34" charset="0"/>
+                <a:ea typeface="Verdana" pitchFamily="34" charset="-122"/>
+                <a:cs typeface="Verdana" pitchFamily="34" charset="-120"/>
+              </a:rPr>
+              <a:t>Primary ·  · IKS Curriculum</a:t>
+            </a:r>
+            <a:endParaRPr lang="en-US" sz="1200" dirty="0"/>
+          </a:p>
+        </p:txBody>
+      </p:sp>
+    </p:spTree>
+  </p:cSld>
+  <p:clrMapOvr>
+    <a:masterClrMapping/>
+  </p:clrMapOvr>
+</p:sld>
+</file>
+
+<file path=ppt/slides/slide10.xml><?xml version="1.0" encoding="utf-8"?>
+<p:sld xmlns:a="http://schemas.openxmlformats.org/drawingml/2006/main" xmlns:r="http://schemas.openxmlformats.org/officeDocument/2006/relationships" xmlns:p="http://schemas.openxmlformats.org/presentationml/2006/main">
+  <p:cSld name="Slide 10">
+    <p:bg>
+      <p:bgPr>
+        <a:solidFill>
+          <a:srgbClr val="FAF7F2"/>
+        </a:solidFill>
+      </p:bgPr>
+    </p:bg>
+    <p:spTree>
+      <p:nvGrpSpPr>
+        <p:cNvPr id="1" name=""/>
+        <p:cNvGrpSpPr/>
+        <p:nvPr/>
+      </p:nvGrpSpPr>
+      <p:grpSpPr>
+        <a:xfrm>
+          <a:off x="0" y="0"/>
+          <a:ext cx="0" cy="0"/>
+          <a:chOff x="0" y="0"/>
+          <a:chExt cx="0" cy="0"/>
+        </a:xfrm>
+      </p:grpSpPr>
+      <p:sp>
+        <p:nvSpPr>
+          <p:cNvPr id="2" name="Text 0"/>
+          <p:cNvSpPr/>
+          <p:nvPr/>
+        </p:nvSpPr>
+        <p:spPr>
+          <a:xfrm>
+            <a:off x="0" y="0"/>
+            <a:ext cx="9144000" cy="101501"/>
+          </a:xfrm>
+          <a:prstGeom prst="rect">
+            <a:avLst/>
+          </a:prstGeom>
+          <a:solidFill>
+            <a:srgbClr val="87A96B"/>
+          </a:solidFill>
+          <a:ln/>
+        </p:spPr>
+        <p:txBody>
+          <a:bodyPr wrap="square" rtlCol="0" anchor="ctr"/>
+          <a:lstStyle/>
+          <a:p>
+            <a:pPr indent="0" marL="0">
+              <a:buNone/>
+            </a:pPr>
+            <a:endParaRPr lang="en-US" dirty="0"/>
+          </a:p>
+        </p:txBody>
+      </p:sp>
+      <p:sp>
+        <p:nvSpPr>
+          <p:cNvPr id="3" name="Text 1"/>
+          <p:cNvSpPr/>
+          <p:nvPr/>
+        </p:nvSpPr>
+        <p:spPr>
+          <a:xfrm>
+            <a:off x="406301" y="457051"/>
             <a:ext cx="8498026" cy="274290"/>
           </a:xfrm>
           <a:prstGeom prst="rect">
@@ -1821,7 +2109,7 @@
                 <a:ea typeface="Georgia" pitchFamily="34" charset="-122"/>
                 <a:cs typeface="Georgia" pitchFamily="34" charset="-120"/>
               </a:rPr>
-              <a:t>Goal</a:t>
+              <a:t>Homework</a:t>
             </a:r>
             <a:endParaRPr lang="en-US" sz="1800" dirty="0"/>
           </a:p>
@@ -1829,14 +2117,14 @@
       </p:sp>
       <p:sp>
         <p:nvSpPr>
-          <p:cNvPr id="6" name="Text 4"/>
+          <p:cNvPr id="4" name="Text 2"/>
           <p:cNvSpPr/>
           <p:nvPr/>
         </p:nvSpPr>
         <p:spPr>
           <a:xfrm>
-            <a:off x="406301" y="1637854"/>
-            <a:ext cx="8498026" cy="213271"/>
+            <a:off x="634901" y="883593"/>
+            <a:ext cx="8102798" cy="487561"/>
           </a:xfrm>
           <a:prstGeom prst="rect">
             <a:avLst/>
@@ -1848,17 +2136,15 @@
           <a:bodyPr wrap="square" lIns="0" tIns="0" rIns="0" bIns="0" rtlCol="0" anchor="t"/>
           <a:lstStyle/>
           <a:p>
-            <a:pPr algn="l" indent="0" marL="0">
-              <a:lnSpc>
-                <a:spcPts val="1680"/>
-              </a:lnSpc>
-              <a:spcBef>
-                <a:spcPts val="300"/>
-              </a:spcBef>
-              <a:spcAft>
-                <a:spcPts val="300"/>
-              </a:spcAft>
-              <a:buNone/>
+            <a:pPr algn="l" marL="342900" indent="-342900">
+              <a:lnSpc>
+                <a:spcPts val="1620"/>
+              </a:lnSpc>
+              <a:spcAft>
+                <a:spcPts val="300"/>
+              </a:spcAft>
+              <a:buSzPct val="100000"/>
+              <a:buChar char="•"/>
             </a:pPr>
             <a:r>
               <a:rPr lang="en-US" sz="1200" dirty="0">
@@ -1869,7 +2155,7 @@
                 <a:ea typeface="Verdana" pitchFamily="34" charset="-122"/>
                 <a:cs typeface="Verdana" pitchFamily="34" charset="-120"/>
               </a:rPr>
-              <a:t>Children learn that the three friends need rest — and that sleep happens at certain times for a reason.</a:t>
+              <a:t>Try ONE bedtime rule tonight (dim lights early, OR no screens before bed, OR same time as last night). Note what happens.</a:t>
             </a:r>
             <a:endParaRPr lang="en-US" sz="1200" dirty="0"/>
           </a:p>
@@ -1877,7 +2163,275 @@
       </p:sp>
       <p:sp>
         <p:nvSpPr>
-          <p:cNvPr id="7" name="Text 5"/>
+          <p:cNvPr id="5" name="Text 3"/>
+          <p:cNvSpPr/>
+          <p:nvPr/>
+        </p:nvSpPr>
+        <p:spPr>
+          <a:xfrm>
+            <a:off x="406301" y="4434929"/>
+            <a:ext cx="8498026" cy="213271"/>
+          </a:xfrm>
+          <a:prstGeom prst="rect">
+            <a:avLst/>
+          </a:prstGeom>
+          <a:noFill/>
+          <a:ln/>
+        </p:spPr>
+        <p:txBody>
+          <a:bodyPr wrap="square" lIns="0" tIns="0" rIns="0" bIns="0" rtlCol="0" anchor="t"/>
+          <a:lstStyle/>
+          <a:p>
+            <a:pPr algn="l" indent="0" marL="0">
+              <a:lnSpc>
+                <a:spcPts val="1680"/>
+              </a:lnSpc>
+              <a:spcBef>
+                <a:spcPts val="300"/>
+              </a:spcBef>
+              <a:spcAft>
+                <a:spcPts val="300"/>
+              </a:spcAft>
+              <a:buNone/>
+            </a:pPr>
+            <a:r>
+              <a:rPr lang="en-US" sz="1200" dirty="0">
+                <a:solidFill>
+                  <a:srgbClr val="2C2C2C"/>
+                </a:solidFill>
+                <a:latin typeface="Verdana" pitchFamily="34" charset="0"/>
+                <a:ea typeface="Verdana" pitchFamily="34" charset="-122"/>
+                <a:cs typeface="Verdana" pitchFamily="34" charset="-120"/>
+              </a:rPr>
+              <a:t>Primary ·  · IKS Curriculum</a:t>
+            </a:r>
+            <a:endParaRPr lang="en-US" sz="1200" dirty="0"/>
+          </a:p>
+        </p:txBody>
+      </p:sp>
+    </p:spTree>
+  </p:cSld>
+  <p:clrMapOvr>
+    <a:masterClrMapping/>
+  </p:clrMapOvr>
+</p:sld>
+</file>
+
+<file path=ppt/slides/slide11.xml><?xml version="1.0" encoding="utf-8"?>
+<p:sld xmlns:a="http://schemas.openxmlformats.org/drawingml/2006/main" xmlns:r="http://schemas.openxmlformats.org/officeDocument/2006/relationships" xmlns:p="http://schemas.openxmlformats.org/presentationml/2006/main">
+  <p:cSld name="Slide 11">
+    <p:bg>
+      <p:bgPr>
+        <a:solidFill>
+          <a:srgbClr val="FAF7F2"/>
+        </a:solidFill>
+      </p:bgPr>
+    </p:bg>
+    <p:spTree>
+      <p:nvGrpSpPr>
+        <p:cNvPr id="1" name=""/>
+        <p:cNvGrpSpPr/>
+        <p:nvPr/>
+      </p:nvGrpSpPr>
+      <p:grpSpPr>
+        <a:xfrm>
+          <a:off x="0" y="0"/>
+          <a:ext cx="0" cy="0"/>
+          <a:chOff x="0" y="0"/>
+          <a:chExt cx="0" cy="0"/>
+        </a:xfrm>
+      </p:grpSpPr>
+      <p:sp>
+        <p:nvSpPr>
+          <p:cNvPr id="2" name="Text 0"/>
+          <p:cNvSpPr/>
+          <p:nvPr/>
+        </p:nvSpPr>
+        <p:spPr>
+          <a:xfrm>
+            <a:off x="0" y="0"/>
+            <a:ext cx="9144000" cy="101501"/>
+          </a:xfrm>
+          <a:prstGeom prst="rect">
+            <a:avLst/>
+          </a:prstGeom>
+          <a:solidFill>
+            <a:srgbClr val="87A96B"/>
+          </a:solidFill>
+          <a:ln/>
+        </p:spPr>
+        <p:txBody>
+          <a:bodyPr wrap="square" rtlCol="0" anchor="ctr"/>
+          <a:lstStyle/>
+          <a:p>
+            <a:pPr indent="0" marL="0">
+              <a:buNone/>
+            </a:pPr>
+            <a:endParaRPr lang="en-US" dirty="0"/>
+          </a:p>
+        </p:txBody>
+      </p:sp>
+      <p:sp>
+        <p:nvSpPr>
+          <p:cNvPr id="3" name="Text 1"/>
+          <p:cNvSpPr/>
+          <p:nvPr/>
+        </p:nvSpPr>
+        <p:spPr>
+          <a:xfrm>
+            <a:off x="406301" y="457051"/>
+            <a:ext cx="8498026" cy="274290"/>
+          </a:xfrm>
+          <a:prstGeom prst="rect">
+            <a:avLst/>
+          </a:prstGeom>
+          <a:noFill/>
+          <a:ln/>
+        </p:spPr>
+        <p:txBody>
+          <a:bodyPr wrap="square" lIns="0" tIns="0" rIns="0" bIns="0" rtlCol="0" anchor="t"/>
+          <a:lstStyle/>
+          <a:p>
+            <a:pPr algn="l" indent="0" marL="0">
+              <a:lnSpc>
+                <a:spcPts val="2160"/>
+              </a:lnSpc>
+              <a:spcBef>
+                <a:spcPts val="600"/>
+              </a:spcBef>
+              <a:spcAft>
+                <a:spcPts val="800"/>
+              </a:spcAft>
+              <a:buNone/>
+            </a:pPr>
+            <a:r>
+              <a:rPr lang="en-US" sz="1800" b="1" dirty="0">
+                <a:solidFill>
+                  <a:srgbClr val="E07A5F"/>
+                </a:solidFill>
+                <a:latin typeface="Georgia" pitchFamily="34" charset="0"/>
+                <a:ea typeface="Georgia" pitchFamily="34" charset="-122"/>
+                <a:cs typeface="Georgia" pitchFamily="34" charset="-120"/>
+              </a:rPr>
+              <a:t>Differentiation</a:t>
+            </a:r>
+            <a:endParaRPr lang="en-US" sz="1800" dirty="0"/>
+          </a:p>
+        </p:txBody>
+      </p:sp>
+      <p:sp>
+        <p:nvSpPr>
+          <p:cNvPr id="4" name="Text 2"/>
+          <p:cNvSpPr/>
+          <p:nvPr/>
+        </p:nvSpPr>
+        <p:spPr>
+          <a:xfrm>
+            <a:off x="634901" y="883593"/>
+            <a:ext cx="8102798" cy="525661"/>
+          </a:xfrm>
+          <a:prstGeom prst="rect">
+            <a:avLst/>
+          </a:prstGeom>
+          <a:noFill/>
+          <a:ln/>
+        </p:spPr>
+        <p:txBody>
+          <a:bodyPr wrap="square" lIns="0" tIns="0" rIns="0" bIns="0" rtlCol="0" anchor="t"/>
+          <a:lstStyle/>
+          <a:p>
+            <a:pPr algn="l" marL="342900" indent="-342900">
+              <a:lnSpc>
+                <a:spcPts val="1620"/>
+              </a:lnSpc>
+              <a:spcAft>
+                <a:spcPts val="300"/>
+              </a:spcAft>
+              <a:buSzPct val="100000"/>
+              <a:buChar char="•"/>
+            </a:pPr>
+            <a:r>
+              <a:rPr lang="en-US" sz="1200" b="1" dirty="0">
+                <a:solidFill>
+                  <a:srgbClr val="2C2C2C"/>
+                </a:solidFill>
+                <a:latin typeface="Verdana" pitchFamily="34" charset="0"/>
+                <a:ea typeface="Verdana" pitchFamily="34" charset="-122"/>
+                <a:cs typeface="Verdana" pitchFamily="34" charset="-120"/>
+              </a:rPr>
+              <a:t>Tier up:</a:t>
+            </a:r>
+            <a:pPr algn="l" indent="0" marL="0">
+              <a:lnSpc>
+                <a:spcPts val="1620"/>
+              </a:lnSpc>
+              <a:spcAft>
+                <a:spcPts val="300"/>
+              </a:spcAft>
+              <a:buNone/>
+            </a:pPr>
+            <a:r>
+              <a:rPr lang="en-US" sz="1200" dirty="0">
+                <a:solidFill>
+                  <a:srgbClr val="2C2C2C"/>
+                </a:solidFill>
+                <a:latin typeface="Verdana" pitchFamily="34" charset="0"/>
+                <a:ea typeface="Verdana" pitchFamily="34" charset="-122"/>
+                <a:cs typeface="Verdana" pitchFamily="34" charset="-120"/>
+              </a:rPr>
+              <a:t> Try 2 bedtime rules.</a:t>
+            </a:r>
+            <a:endParaRPr lang="en-US" sz="1200" dirty="0"/>
+          </a:p>
+          <a:p>
+            <a:pPr algn="l" marL="342900" indent="-342900">
+              <a:lnSpc>
+                <a:spcPts val="1620"/>
+              </a:lnSpc>
+              <a:spcAft>
+                <a:spcPts val="300"/>
+              </a:spcAft>
+              <a:buSzPct val="100000"/>
+              <a:buChar char="•"/>
+            </a:pPr>
+            <a:r>
+              <a:rPr lang="en-US" sz="1200" b="1" dirty="0">
+                <a:solidFill>
+                  <a:srgbClr val="2C2C2C"/>
+                </a:solidFill>
+                <a:latin typeface="Verdana" pitchFamily="34" charset="0"/>
+                <a:ea typeface="Verdana" pitchFamily="34" charset="-122"/>
+                <a:cs typeface="Verdana" pitchFamily="34" charset="-120"/>
+              </a:rPr>
+              <a:t>Tier down:</a:t>
+            </a:r>
+            <a:pPr algn="l" indent="0" marL="0">
+              <a:lnSpc>
+                <a:spcPts val="1620"/>
+              </a:lnSpc>
+              <a:spcAft>
+                <a:spcPts val="300"/>
+              </a:spcAft>
+              <a:buNone/>
+            </a:pPr>
+            <a:r>
+              <a:rPr lang="en-US" sz="1200" dirty="0">
+                <a:solidFill>
+                  <a:srgbClr val="2C2C2C"/>
+                </a:solidFill>
+                <a:latin typeface="Verdana" pitchFamily="34" charset="0"/>
+                <a:ea typeface="Verdana" pitchFamily="34" charset="-122"/>
+                <a:cs typeface="Verdana" pitchFamily="34" charset="-120"/>
+              </a:rPr>
+              <a:t> Just remember: sleep at the same time, before 10pm.</a:t>
+            </a:r>
+            <a:endParaRPr lang="en-US" sz="1200" dirty="0"/>
+          </a:p>
+        </p:txBody>
+      </p:sp>
+      <p:sp>
+        <p:nvSpPr>
+          <p:cNvPr id="5" name="Text 3"/>
           <p:cNvSpPr/>
           <p:nvPr/>
         </p:nvSpPr>
@@ -2027,7 +2581,7 @@
                 <a:ea typeface="Georgia" pitchFamily="34" charset="-122"/>
                 <a:cs typeface="Georgia" pitchFamily="34" charset="-120"/>
               </a:rPr>
-              <a:t>Materials</a:t>
+              <a:t>Goal</a:t>
             </a:r>
             <a:endParaRPr lang="en-US" sz="1800" dirty="0"/>
           </a:p>
@@ -2075,7 +2629,7 @@
                 <a:ea typeface="Verdana" pitchFamily="34" charset="-122"/>
                 <a:cs typeface="Verdana" pitchFamily="34" charset="-120"/>
               </a:rPr>
-              <a:t>– Drawing paper – Optional: a "clock face" drawn on the board</a:t>
+              <a:t>Children learn that the three friends need rest — and that sleep happens at certain times for a reason.</a:t>
             </a:r>
             <a:endParaRPr lang="en-US" sz="1200" dirty="0"/>
           </a:p>
@@ -2233,7 +2787,7 @@
                 <a:ea typeface="Georgia" pitchFamily="34" charset="-122"/>
                 <a:cs typeface="Georgia" pitchFamily="34" charset="-120"/>
               </a:rPr>
-              <a:t>Flow</a:t>
+              <a:t>Materials</a:t>
             </a:r>
             <a:endParaRPr lang="en-US" sz="1800" dirty="0"/>
           </a:p>
@@ -2242,6 +2796,76 @@
       <p:sp>
         <p:nvSpPr>
           <p:cNvPr id="4" name="Text 2"/>
+          <p:cNvSpPr/>
+          <p:nvPr/>
+        </p:nvSpPr>
+        <p:spPr>
+          <a:xfrm>
+            <a:off x="634901" y="883593"/>
+            <a:ext cx="8102798" cy="525661"/>
+          </a:xfrm>
+          <a:prstGeom prst="rect">
+            <a:avLst/>
+          </a:prstGeom>
+          <a:noFill/>
+          <a:ln/>
+        </p:spPr>
+        <p:txBody>
+          <a:bodyPr wrap="square" lIns="0" tIns="0" rIns="0" bIns="0" rtlCol="0" anchor="t"/>
+          <a:lstStyle/>
+          <a:p>
+            <a:pPr algn="l" marL="342900" indent="-342900">
+              <a:lnSpc>
+                <a:spcPts val="1620"/>
+              </a:lnSpc>
+              <a:spcAft>
+                <a:spcPts val="300"/>
+              </a:spcAft>
+              <a:buSzPct val="100000"/>
+              <a:buChar char="•"/>
+            </a:pPr>
+            <a:r>
+              <a:rPr lang="en-US" sz="1200" dirty="0">
+                <a:solidFill>
+                  <a:srgbClr val="2C2C2C"/>
+                </a:solidFill>
+                <a:latin typeface="Verdana" pitchFamily="34" charset="0"/>
+                <a:ea typeface="Verdana" pitchFamily="34" charset="-122"/>
+                <a:cs typeface="Verdana" pitchFamily="34" charset="-120"/>
+              </a:rPr>
+              <a:t>Drawing paper</a:t>
+            </a:r>
+            <a:endParaRPr lang="en-US" sz="1200" dirty="0"/>
+          </a:p>
+          <a:p>
+            <a:pPr algn="l" marL="342900" indent="-342900">
+              <a:lnSpc>
+                <a:spcPts val="1620"/>
+              </a:lnSpc>
+              <a:spcAft>
+                <a:spcPts val="300"/>
+              </a:spcAft>
+              <a:buSzPct val="100000"/>
+              <a:buChar char="•"/>
+            </a:pPr>
+            <a:r>
+              <a:rPr lang="en-US" sz="1200" dirty="0">
+                <a:solidFill>
+                  <a:srgbClr val="2C2C2C"/>
+                </a:solidFill>
+                <a:latin typeface="Verdana" pitchFamily="34" charset="0"/>
+                <a:ea typeface="Verdana" pitchFamily="34" charset="-122"/>
+                <a:cs typeface="Verdana" pitchFamily="34" charset="-120"/>
+              </a:rPr>
+              <a:t>Optional: a "clock face" drawn on the board</a:t>
+            </a:r>
+            <a:endParaRPr lang="en-US" sz="1200" dirty="0"/>
+          </a:p>
+        </p:txBody>
+      </p:sp>
+      <p:sp>
+        <p:nvSpPr>
+          <p:cNvPr id="5" name="Text 3"/>
           <p:cNvSpPr/>
           <p:nvPr/>
         </p:nvSpPr>
@@ -2391,7 +3015,7 @@
                 <a:ea typeface="Georgia" pitchFamily="34" charset="-122"/>
                 <a:cs typeface="Georgia" pitchFamily="34" charset="-120"/>
               </a:rPr>
-              <a:t>Settle + chant + song (5 min)</a:t>
+              <a:t>Flow</a:t>
             </a:r>
             <a:endParaRPr lang="en-US" sz="1800" dirty="0"/>
           </a:p>
@@ -2549,7 +3173,7 @@
                 <a:ea typeface="Georgia" pitchFamily="34" charset="-122"/>
                 <a:cs typeface="Georgia" pitchFamily="34" charset="-120"/>
               </a:rPr>
-              <a:t>Story (10 min)</a:t>
+              <a:t>Settle + chant + song (5 min)</a:t>
             </a:r>
             <a:endParaRPr lang="en-US" sz="1800" dirty="0"/>
           </a:p>
@@ -2558,221 +3182,6 @@
       <p:sp>
         <p:nvSpPr>
           <p:cNvPr id="4" name="Text 2"/>
-          <p:cNvSpPr/>
-          <p:nvPr/>
-        </p:nvSpPr>
-        <p:spPr>
-          <a:xfrm>
-            <a:off x="406301" y="870942"/>
-            <a:ext cx="8498026" cy="213271"/>
-          </a:xfrm>
-          <a:prstGeom prst="rect">
-            <a:avLst/>
-          </a:prstGeom>
-          <a:noFill/>
-          <a:ln/>
-        </p:spPr>
-        <p:txBody>
-          <a:bodyPr wrap="square" lIns="0" tIns="0" rIns="0" bIns="0" rtlCol="0" anchor="t"/>
-          <a:lstStyle/>
-          <a:p>
-            <a:pPr algn="l" indent="0" marL="0">
-              <a:lnSpc>
-                <a:spcPts val="1680"/>
-              </a:lnSpc>
-              <a:spcBef>
-                <a:spcPts val="300"/>
-              </a:spcBef>
-              <a:spcAft>
-                <a:spcPts val="300"/>
-              </a:spcAft>
-              <a:buNone/>
-            </a:pPr>
-            <a:r>
-              <a:rPr lang="en-US" sz="1200" i="1" dirty="0">
-                <a:solidFill>
-                  <a:srgbClr val="2C2C2C"/>
-                </a:solidFill>
-                <a:latin typeface="Verdana" pitchFamily="34" charset="0"/>
-                <a:ea typeface="Verdana" pitchFamily="34" charset="-122"/>
-                <a:cs typeface="Verdana" pitchFamily="34" charset="-120"/>
-              </a:rPr>
-              <a:t>"Just like you have a bedtime, the three friends have rest times."</a:t>
-            </a:r>
-            <a:endParaRPr lang="en-US" sz="1200" dirty="0"/>
-          </a:p>
-        </p:txBody>
-      </p:sp>
-      <p:sp>
-        <p:nvSpPr>
-          <p:cNvPr id="5" name="Text 3"/>
-          <p:cNvSpPr/>
-          <p:nvPr/>
-        </p:nvSpPr>
-        <p:spPr>
-          <a:xfrm>
-            <a:off x="406301" y="1160413"/>
-            <a:ext cx="8498026" cy="426541"/>
-          </a:xfrm>
-          <a:prstGeom prst="rect">
-            <a:avLst/>
-          </a:prstGeom>
-          <a:noFill/>
-          <a:ln/>
-        </p:spPr>
-        <p:txBody>
-          <a:bodyPr wrap="square" lIns="0" tIns="0" rIns="0" bIns="0" rtlCol="0" anchor="t"/>
-          <a:lstStyle/>
-          <a:p>
-            <a:pPr algn="l" indent="0" marL="0">
-              <a:lnSpc>
-                <a:spcPts val="1680"/>
-              </a:lnSpc>
-              <a:spcBef>
-                <a:spcPts val="300"/>
-              </a:spcBef>
-              <a:spcAft>
-                <a:spcPts val="300"/>
-              </a:spcAft>
-              <a:buNone/>
-            </a:pPr>
-            <a:r>
-              <a:rPr lang="en-US" sz="1200" i="1" dirty="0">
-                <a:solidFill>
-                  <a:srgbClr val="2C2C2C"/>
-                </a:solidFill>
-                <a:latin typeface="Verdana" pitchFamily="34" charset="0"/>
-                <a:ea typeface="Verdana" pitchFamily="34" charset="-122"/>
-                <a:cs typeface="Verdana" pitchFamily="34" charset="-120"/>
-              </a:rPr>
-              <a:t>"Pitta (fire friend) does her big work after you sleep — she fixes things inside your body while you rest. So if you sleep late, Pitta can't do her work properly."</a:t>
-            </a:r>
-            <a:endParaRPr lang="en-US" sz="1200" dirty="0"/>
-          </a:p>
-        </p:txBody>
-      </p:sp>
-      <p:sp>
-        <p:nvSpPr>
-          <p:cNvPr id="6" name="Text 4"/>
-          <p:cNvSpPr/>
-          <p:nvPr/>
-        </p:nvSpPr>
-        <p:spPr>
-          <a:xfrm>
-            <a:off x="406301" y="1663154"/>
-            <a:ext cx="8498026" cy="213271"/>
-          </a:xfrm>
-          <a:prstGeom prst="rect">
-            <a:avLst/>
-          </a:prstGeom>
-          <a:noFill/>
-          <a:ln/>
-        </p:spPr>
-        <p:txBody>
-          <a:bodyPr wrap="square" lIns="0" tIns="0" rIns="0" bIns="0" rtlCol="0" anchor="t"/>
-          <a:lstStyle/>
-          <a:p>
-            <a:pPr algn="l" indent="0" marL="0">
-              <a:lnSpc>
-                <a:spcPts val="1680"/>
-              </a:lnSpc>
-              <a:spcBef>
-                <a:spcPts val="300"/>
-              </a:spcBef>
-              <a:spcAft>
-                <a:spcPts val="300"/>
-              </a:spcAft>
-              <a:buNone/>
-            </a:pPr>
-            <a:r>
-              <a:rPr lang="en-US" sz="1200" i="1" dirty="0">
-                <a:solidFill>
-                  <a:srgbClr val="2C2C2C"/>
-                </a:solidFill>
-                <a:latin typeface="Verdana" pitchFamily="34" charset="0"/>
-                <a:ea typeface="Verdana" pitchFamily="34" charset="-122"/>
-                <a:cs typeface="Verdana" pitchFamily="34" charset="-120"/>
-              </a:rPr>
-              <a:t>"The friends like you to sleep BY 9 OR 10 at night, and wake UP with the sun."</a:t>
-            </a:r>
-            <a:endParaRPr lang="en-US" sz="1200" dirty="0"/>
-          </a:p>
-        </p:txBody>
-      </p:sp>
-      <p:sp>
-        <p:nvSpPr>
-          <p:cNvPr id="7" name="Text 5"/>
-          <p:cNvSpPr/>
-          <p:nvPr/>
-        </p:nvSpPr>
-        <p:spPr>
-          <a:xfrm>
-            <a:off x="406301" y="1952625"/>
-            <a:ext cx="8498026" cy="639812"/>
-          </a:xfrm>
-          <a:prstGeom prst="rect">
-            <a:avLst/>
-          </a:prstGeom>
-          <a:noFill/>
-          <a:ln/>
-        </p:spPr>
-        <p:txBody>
-          <a:bodyPr wrap="square" lIns="0" tIns="0" rIns="0" bIns="0" rtlCol="0" anchor="t"/>
-          <a:lstStyle/>
-          <a:p>
-            <a:pPr algn="l" indent="0" marL="0">
-              <a:lnSpc>
-                <a:spcPts val="1680"/>
-              </a:lnSpc>
-              <a:spcBef>
-                <a:spcPts val="300"/>
-              </a:spcBef>
-              <a:spcAft>
-                <a:spcPts val="300"/>
-              </a:spcAft>
-              <a:buNone/>
-            </a:pPr>
-            <a:r>
-              <a:rPr lang="en-US" sz="1200" b="1" dirty="0">
-                <a:solidFill>
-                  <a:srgbClr val="2C2C2C"/>
-                </a:solidFill>
-                <a:latin typeface="Verdana" pitchFamily="34" charset="0"/>
-                <a:ea typeface="Verdana" pitchFamily="34" charset="-122"/>
-                <a:cs typeface="Verdana" pitchFamily="34" charset="-120"/>
-              </a:rPr>
-              <a:t>Sleep rules from the three friends:</a:t>
-            </a:r>
-            <a:pPr algn="l" indent="0" marL="0">
-              <a:lnSpc>
-                <a:spcPts val="1680"/>
-              </a:lnSpc>
-              <a:spcBef>
-                <a:spcPts val="300"/>
-              </a:spcBef>
-              <a:spcAft>
-                <a:spcPts val="300"/>
-              </a:spcAft>
-              <a:buNone/>
-            </a:pPr>
-            <a:r>
-              <a:rPr lang="en-US" sz="1200" dirty="0">
-                <a:solidFill>
-                  <a:srgbClr val="2C2C2C"/>
-                </a:solidFill>
-                <a:latin typeface="Verdana" pitchFamily="34" charset="0"/>
-                <a:ea typeface="Verdana" pitchFamily="34" charset="-122"/>
-                <a:cs typeface="Verdana" pitchFamily="34" charset="-120"/>
-              </a:rPr>
-              <a:t> – Sleep at the same time every night (friends like routine). – Dim lights an hour before sleep (Pitta calms when it gets dark). – No big meal right before sleep (friends are busy digesting; can't rest). – Quiet wind-down (Vāta needs settling).</a:t>
-            </a:r>
-            <a:endParaRPr lang="en-US" sz="1200" dirty="0"/>
-          </a:p>
-        </p:txBody>
-      </p:sp>
-      <p:sp>
-        <p:nvSpPr>
-          <p:cNvPr id="8" name="Text 6"/>
           <p:cNvSpPr/>
           <p:nvPr/>
         </p:nvSpPr>
@@ -2922,7 +3331,7 @@
                 <a:ea typeface="Georgia" pitchFamily="34" charset="-122"/>
                 <a:cs typeface="Georgia" pitchFamily="34" charset="-120"/>
               </a:rPr>
-              <a:t>Activity (10 min)</a:t>
+              <a:t>Story (10 min)</a:t>
             </a:r>
             <a:endParaRPr lang="en-US" sz="1800" dirty="0"/>
           </a:p>
@@ -2962,7 +3371,7 @@
               <a:buNone/>
             </a:pPr>
             <a:r>
-              <a:rPr lang="en-US" sz="1200" dirty="0">
+              <a:rPr lang="en-US" sz="1200" i="1" dirty="0">
                 <a:solidFill>
                   <a:srgbClr val="2C2C2C"/>
                 </a:solidFill>
@@ -2970,7 +3379,7 @@
                 <a:ea typeface="Verdana" pitchFamily="34" charset="-122"/>
                 <a:cs typeface="Verdana" pitchFamily="34" charset="-120"/>
               </a:rPr>
-              <a:t>Each child draws their "best bedtime routine" in 4 panels:</a:t>
+              <a:t>"Just like you have a bedtime, the three friends have rest times."</a:t>
             </a:r>
             <a:endParaRPr lang="en-US" sz="1200" dirty="0"/>
           </a:p>
@@ -2984,8 +3393,8 @@
         </p:nvSpPr>
         <p:spPr>
           <a:xfrm>
-            <a:off x="634901" y="1173063"/>
-            <a:ext cx="8102798" cy="1013222"/>
+            <a:off x="406301" y="1160413"/>
+            <a:ext cx="8498026" cy="426541"/>
           </a:xfrm>
           <a:prstGeom prst="rect">
             <a:avLst/>
@@ -2997,18 +3406,20 @@
           <a:bodyPr wrap="square" lIns="0" tIns="0" rIns="0" bIns="0" rtlCol="0" anchor="t"/>
           <a:lstStyle/>
           <a:p>
-            <a:pPr algn="l" marL="342900" indent="-342900">
-              <a:lnSpc>
-                <a:spcPts val="1620"/>
-              </a:lnSpc>
-              <a:spcAft>
-                <a:spcPts val="300"/>
-              </a:spcAft>
-              <a:buSzPct val="100000"/>
-              <a:buChar char="•"/>
-            </a:pPr>
-            <a:r>
-              <a:rPr lang="en-US" sz="1200" dirty="0">
+            <a:pPr algn="l" indent="0" marL="0">
+              <a:lnSpc>
+                <a:spcPts val="1680"/>
+              </a:lnSpc>
+              <a:spcBef>
+                <a:spcPts val="300"/>
+              </a:spcBef>
+              <a:spcAft>
+                <a:spcPts val="300"/>
+              </a:spcAft>
+              <a:buNone/>
+            </a:pPr>
+            <a:r>
+              <a:rPr lang="en-US" sz="1200" i="1" dirty="0">
                 <a:solidFill>
                   <a:srgbClr val="2C2C2C"/>
                 </a:solidFill>
@@ -3016,23 +3427,47 @@
                 <a:ea typeface="Verdana" pitchFamily="34" charset="-122"/>
                 <a:cs typeface="Verdana" pitchFamily="34" charset="-120"/>
               </a:rPr>
-              <a:t>After dinner</a:t>
+              <a:t>"Pitta (fire friend) does her big work after you sleep — she fixes things inside your body while you rest. So if you sleep late, Pitta can't do her work properly."</a:t>
             </a:r>
             <a:endParaRPr lang="en-US" sz="1200" dirty="0"/>
           </a:p>
-          <a:p>
-            <a:pPr algn="l" marL="342900" indent="-342900">
-              <a:lnSpc>
-                <a:spcPts val="1620"/>
-              </a:lnSpc>
-              <a:spcAft>
-                <a:spcPts val="300"/>
-              </a:spcAft>
-              <a:buSzPct val="100000"/>
-              <a:buChar char="•"/>
-            </a:pPr>
-            <a:r>
-              <a:rPr lang="en-US" sz="1200" dirty="0">
+        </p:txBody>
+      </p:sp>
+      <p:sp>
+        <p:nvSpPr>
+          <p:cNvPr id="6" name="Text 4"/>
+          <p:cNvSpPr/>
+          <p:nvPr/>
+        </p:nvSpPr>
+        <p:spPr>
+          <a:xfrm>
+            <a:off x="406301" y="1663154"/>
+            <a:ext cx="8498026" cy="213271"/>
+          </a:xfrm>
+          <a:prstGeom prst="rect">
+            <a:avLst/>
+          </a:prstGeom>
+          <a:noFill/>
+          <a:ln/>
+        </p:spPr>
+        <p:txBody>
+          <a:bodyPr wrap="square" lIns="0" tIns="0" rIns="0" bIns="0" rtlCol="0" anchor="t"/>
+          <a:lstStyle/>
+          <a:p>
+            <a:pPr algn="l" indent="0" marL="0">
+              <a:lnSpc>
+                <a:spcPts val="1680"/>
+              </a:lnSpc>
+              <a:spcBef>
+                <a:spcPts val="300"/>
+              </a:spcBef>
+              <a:spcAft>
+                <a:spcPts val="300"/>
+              </a:spcAft>
+              <a:buNone/>
+            </a:pPr>
+            <a:r>
+              <a:rPr lang="en-US" sz="1200" i="1" dirty="0">
                 <a:solidFill>
                   <a:srgbClr val="2C2C2C"/>
                 </a:solidFill>
@@ -3040,63 +3475,15 @@
                 <a:ea typeface="Verdana" pitchFamily="34" charset="-122"/>
                 <a:cs typeface="Verdana" pitchFamily="34" charset="-120"/>
               </a:rPr>
-              <a:t>Brushing teeth</a:t>
+              <a:t>"The friends like you to sleep BY 9 OR 10 at night, and wake UP with the sun."</a:t>
             </a:r>
             <a:endParaRPr lang="en-US" sz="1200" dirty="0"/>
           </a:p>
-          <a:p>
-            <a:pPr algn="l" marL="342900" indent="-342900">
-              <a:lnSpc>
-                <a:spcPts val="1620"/>
-              </a:lnSpc>
-              <a:spcAft>
-                <a:spcPts val="300"/>
-              </a:spcAft>
-              <a:buSzPct val="100000"/>
-              <a:buChar char="•"/>
-            </a:pPr>
-            <a:r>
-              <a:rPr lang="en-US" sz="1200" dirty="0">
-                <a:solidFill>
-                  <a:srgbClr val="2C2C2C"/>
-                </a:solidFill>
-                <a:latin typeface="Verdana" pitchFamily="34" charset="0"/>
-                <a:ea typeface="Verdana" pitchFamily="34" charset="-122"/>
-                <a:cs typeface="Verdana" pitchFamily="34" charset="-120"/>
-              </a:rPr>
-              <a:t>Quiet activity (reading, drawing)</a:t>
-            </a:r>
-            <a:endParaRPr lang="en-US" sz="1200" dirty="0"/>
-          </a:p>
-          <a:p>
-            <a:pPr algn="l" marL="342900" indent="-342900">
-              <a:lnSpc>
-                <a:spcPts val="1620"/>
-              </a:lnSpc>
-              <a:spcAft>
-                <a:spcPts val="300"/>
-              </a:spcAft>
-              <a:buSzPct val="100000"/>
-              <a:buChar char="•"/>
-            </a:pPr>
-            <a:r>
-              <a:rPr lang="en-US" sz="1200" dirty="0">
-                <a:solidFill>
-                  <a:srgbClr val="2C2C2C"/>
-                </a:solidFill>
-                <a:latin typeface="Verdana" pitchFamily="34" charset="0"/>
-                <a:ea typeface="Verdana" pitchFamily="34" charset="-122"/>
-                <a:cs typeface="Verdana" pitchFamily="34" charset="-120"/>
-              </a:rPr>
-              <a:t>Sleep</a:t>
-            </a:r>
-            <a:endParaRPr lang="en-US" sz="1200" dirty="0"/>
-          </a:p>
-        </p:txBody>
-      </p:sp>
-      <p:sp>
-        <p:nvSpPr>
-          <p:cNvPr id="6" name="Text 4"/>
+        </p:txBody>
+      </p:sp>
+      <p:sp>
+        <p:nvSpPr>
+          <p:cNvPr id="7" name="Text 5"/>
           <p:cNvSpPr/>
           <p:nvPr/>
         </p:nvSpPr>
@@ -3246,7 +3633,7 @@
                 <a:ea typeface="Georgia" pitchFamily="34" charset="-122"/>
                 <a:cs typeface="Georgia" pitchFamily="34" charset="-120"/>
               </a:rPr>
-              <a:t>Show + chant (5 min)</a:t>
+              <a:t>Story (10 min) (cont.)</a:t>
             </a:r>
             <a:endParaRPr lang="en-US" sz="1800" dirty="0"/>
           </a:p>
@@ -3286,7 +3673,7 @@
               <a:buNone/>
             </a:pPr>
             <a:r>
-              <a:rPr lang="en-US" sz="1200" dirty="0">
+              <a:rPr lang="en-US" sz="1200" b="1" dirty="0">
                 <a:solidFill>
                   <a:srgbClr val="2C2C2C"/>
                 </a:solidFill>
@@ -3294,7 +3681,7 @@
                 <a:ea typeface="Verdana" pitchFamily="34" charset="-122"/>
                 <a:cs typeface="Verdana" pitchFamily="34" charset="-120"/>
               </a:rPr>
-              <a:t>– 2 children share their drawings. – Chant + song.</a:t>
+              <a:t>Sleep rules from the three friends:</a:t>
             </a:r>
             <a:endParaRPr lang="en-US" sz="1200" dirty="0"/>
           </a:p>
@@ -3303,6 +3690,124 @@
       <p:sp>
         <p:nvSpPr>
           <p:cNvPr id="5" name="Text 3"/>
+          <p:cNvSpPr/>
+          <p:nvPr/>
+        </p:nvSpPr>
+        <p:spPr>
+          <a:xfrm>
+            <a:off x="634901" y="1173063"/>
+            <a:ext cx="8102798" cy="1013222"/>
+          </a:xfrm>
+          <a:prstGeom prst="rect">
+            <a:avLst/>
+          </a:prstGeom>
+          <a:noFill/>
+          <a:ln/>
+        </p:spPr>
+        <p:txBody>
+          <a:bodyPr wrap="square" lIns="0" tIns="0" rIns="0" bIns="0" rtlCol="0" anchor="t"/>
+          <a:lstStyle/>
+          <a:p>
+            <a:pPr algn="l" marL="342900" indent="-342900">
+              <a:lnSpc>
+                <a:spcPts val="1620"/>
+              </a:lnSpc>
+              <a:spcAft>
+                <a:spcPts val="300"/>
+              </a:spcAft>
+              <a:buSzPct val="100000"/>
+              <a:buChar char="•"/>
+            </a:pPr>
+            <a:r>
+              <a:rPr lang="en-US" sz="1200" dirty="0">
+                <a:solidFill>
+                  <a:srgbClr val="2C2C2C"/>
+                </a:solidFill>
+                <a:latin typeface="Verdana" pitchFamily="34" charset="0"/>
+                <a:ea typeface="Verdana" pitchFamily="34" charset="-122"/>
+                <a:cs typeface="Verdana" pitchFamily="34" charset="-120"/>
+              </a:rPr>
+              <a:t>Sleep at the same time every night (friends like routine).</a:t>
+            </a:r>
+            <a:endParaRPr lang="en-US" sz="1200" dirty="0"/>
+          </a:p>
+          <a:p>
+            <a:pPr algn="l" marL="342900" indent="-342900">
+              <a:lnSpc>
+                <a:spcPts val="1620"/>
+              </a:lnSpc>
+              <a:spcAft>
+                <a:spcPts val="300"/>
+              </a:spcAft>
+              <a:buSzPct val="100000"/>
+              <a:buChar char="•"/>
+            </a:pPr>
+            <a:r>
+              <a:rPr lang="en-US" sz="1200" dirty="0">
+                <a:solidFill>
+                  <a:srgbClr val="2C2C2C"/>
+                </a:solidFill>
+                <a:latin typeface="Verdana" pitchFamily="34" charset="0"/>
+                <a:ea typeface="Verdana" pitchFamily="34" charset="-122"/>
+                <a:cs typeface="Verdana" pitchFamily="34" charset="-120"/>
+              </a:rPr>
+              <a:t>Dim lights an hour before sleep (Pitta calms when it gets dark).</a:t>
+            </a:r>
+            <a:endParaRPr lang="en-US" sz="1200" dirty="0"/>
+          </a:p>
+          <a:p>
+            <a:pPr algn="l" marL="342900" indent="-342900">
+              <a:lnSpc>
+                <a:spcPts val="1620"/>
+              </a:lnSpc>
+              <a:spcAft>
+                <a:spcPts val="300"/>
+              </a:spcAft>
+              <a:buSzPct val="100000"/>
+              <a:buChar char="•"/>
+            </a:pPr>
+            <a:r>
+              <a:rPr lang="en-US" sz="1200" dirty="0">
+                <a:solidFill>
+                  <a:srgbClr val="2C2C2C"/>
+                </a:solidFill>
+                <a:latin typeface="Verdana" pitchFamily="34" charset="0"/>
+                <a:ea typeface="Verdana" pitchFamily="34" charset="-122"/>
+                <a:cs typeface="Verdana" pitchFamily="34" charset="-120"/>
+              </a:rPr>
+              <a:t>No big meal right before sleep (friends are busy digesting; can't rest).</a:t>
+            </a:r>
+            <a:endParaRPr lang="en-US" sz="1200" dirty="0"/>
+          </a:p>
+          <a:p>
+            <a:pPr algn="l" marL="342900" indent="-342900">
+              <a:lnSpc>
+                <a:spcPts val="1620"/>
+              </a:lnSpc>
+              <a:spcAft>
+                <a:spcPts val="300"/>
+              </a:spcAft>
+              <a:buSzPct val="100000"/>
+              <a:buChar char="•"/>
+            </a:pPr>
+            <a:r>
+              <a:rPr lang="en-US" sz="1200" dirty="0">
+                <a:solidFill>
+                  <a:srgbClr val="2C2C2C"/>
+                </a:solidFill>
+                <a:latin typeface="Verdana" pitchFamily="34" charset="0"/>
+                <a:ea typeface="Verdana" pitchFamily="34" charset="-122"/>
+                <a:cs typeface="Verdana" pitchFamily="34" charset="-120"/>
+              </a:rPr>
+              <a:t>Quiet wind-down (Vāta needs settling).</a:t>
+            </a:r>
+            <a:endParaRPr lang="en-US" sz="1200" dirty="0"/>
+          </a:p>
+        </p:txBody>
+      </p:sp>
+      <p:sp>
+        <p:nvSpPr>
+          <p:cNvPr id="6" name="Text 4"/>
           <p:cNvSpPr/>
           <p:nvPr/>
         </p:nvSpPr>
@@ -3452,7 +3957,7 @@
                 <a:ea typeface="Georgia" pitchFamily="34" charset="-122"/>
                 <a:cs typeface="Georgia" pitchFamily="34" charset="-120"/>
               </a:rPr>
-              <a:t>Homework</a:t>
+              <a:t>Activity (10 min)</a:t>
             </a:r>
             <a:endParaRPr lang="en-US" sz="1800" dirty="0"/>
           </a:p>
@@ -3467,7 +3972,7 @@
         <p:spPr>
           <a:xfrm>
             <a:off x="406301" y="870942"/>
-            <a:ext cx="8498026" cy="426541"/>
+            <a:ext cx="8498026" cy="213271"/>
           </a:xfrm>
           <a:prstGeom prst="rect">
             <a:avLst/>
@@ -3500,7 +4005,7 @@
                 <a:ea typeface="Verdana" pitchFamily="34" charset="-122"/>
                 <a:cs typeface="Verdana" pitchFamily="34" charset="-120"/>
               </a:rPr>
-              <a:t>– Try ONE bedtime rule tonight (dim lights early, OR no screens before bed, OR same time as last night). Note what happens.</a:t>
+              <a:t>Each child draws their "best bedtime routine" in 4 panels:</a:t>
             </a:r>
             <a:endParaRPr lang="en-US" sz="1200" dirty="0"/>
           </a:p>
@@ -3509,6 +4014,124 @@
       <p:sp>
         <p:nvSpPr>
           <p:cNvPr id="5" name="Text 3"/>
+          <p:cNvSpPr/>
+          <p:nvPr/>
+        </p:nvSpPr>
+        <p:spPr>
+          <a:xfrm>
+            <a:off x="634901" y="1173063"/>
+            <a:ext cx="8102798" cy="1013222"/>
+          </a:xfrm>
+          <a:prstGeom prst="rect">
+            <a:avLst/>
+          </a:prstGeom>
+          <a:noFill/>
+          <a:ln/>
+        </p:spPr>
+        <p:txBody>
+          <a:bodyPr wrap="square" lIns="0" tIns="0" rIns="0" bIns="0" rtlCol="0" anchor="t"/>
+          <a:lstStyle/>
+          <a:p>
+            <a:pPr algn="l" marL="342900" indent="-342900">
+              <a:lnSpc>
+                <a:spcPts val="1620"/>
+              </a:lnSpc>
+              <a:spcAft>
+                <a:spcPts val="300"/>
+              </a:spcAft>
+              <a:buSzPct val="100000"/>
+              <a:buChar char="•"/>
+            </a:pPr>
+            <a:r>
+              <a:rPr lang="en-US" sz="1200" dirty="0">
+                <a:solidFill>
+                  <a:srgbClr val="2C2C2C"/>
+                </a:solidFill>
+                <a:latin typeface="Verdana" pitchFamily="34" charset="0"/>
+                <a:ea typeface="Verdana" pitchFamily="34" charset="-122"/>
+                <a:cs typeface="Verdana" pitchFamily="34" charset="-120"/>
+              </a:rPr>
+              <a:t>After dinner</a:t>
+            </a:r>
+            <a:endParaRPr lang="en-US" sz="1200" dirty="0"/>
+          </a:p>
+          <a:p>
+            <a:pPr algn="l" marL="342900" indent="-342900">
+              <a:lnSpc>
+                <a:spcPts val="1620"/>
+              </a:lnSpc>
+              <a:spcAft>
+                <a:spcPts val="300"/>
+              </a:spcAft>
+              <a:buSzPct val="100000"/>
+              <a:buChar char="•"/>
+            </a:pPr>
+            <a:r>
+              <a:rPr lang="en-US" sz="1200" dirty="0">
+                <a:solidFill>
+                  <a:srgbClr val="2C2C2C"/>
+                </a:solidFill>
+                <a:latin typeface="Verdana" pitchFamily="34" charset="0"/>
+                <a:ea typeface="Verdana" pitchFamily="34" charset="-122"/>
+                <a:cs typeface="Verdana" pitchFamily="34" charset="-120"/>
+              </a:rPr>
+              <a:t>Brushing teeth</a:t>
+            </a:r>
+            <a:endParaRPr lang="en-US" sz="1200" dirty="0"/>
+          </a:p>
+          <a:p>
+            <a:pPr algn="l" marL="342900" indent="-342900">
+              <a:lnSpc>
+                <a:spcPts val="1620"/>
+              </a:lnSpc>
+              <a:spcAft>
+                <a:spcPts val="300"/>
+              </a:spcAft>
+              <a:buSzPct val="100000"/>
+              <a:buChar char="•"/>
+            </a:pPr>
+            <a:r>
+              <a:rPr lang="en-US" sz="1200" dirty="0">
+                <a:solidFill>
+                  <a:srgbClr val="2C2C2C"/>
+                </a:solidFill>
+                <a:latin typeface="Verdana" pitchFamily="34" charset="0"/>
+                <a:ea typeface="Verdana" pitchFamily="34" charset="-122"/>
+                <a:cs typeface="Verdana" pitchFamily="34" charset="-120"/>
+              </a:rPr>
+              <a:t>Quiet activity (reading, drawing)</a:t>
+            </a:r>
+            <a:endParaRPr lang="en-US" sz="1200" dirty="0"/>
+          </a:p>
+          <a:p>
+            <a:pPr algn="l" marL="342900" indent="-342900">
+              <a:lnSpc>
+                <a:spcPts val="1620"/>
+              </a:lnSpc>
+              <a:spcAft>
+                <a:spcPts val="300"/>
+              </a:spcAft>
+              <a:buSzPct val="100000"/>
+              <a:buChar char="•"/>
+            </a:pPr>
+            <a:r>
+              <a:rPr lang="en-US" sz="1200" dirty="0">
+                <a:solidFill>
+                  <a:srgbClr val="2C2C2C"/>
+                </a:solidFill>
+                <a:latin typeface="Verdana" pitchFamily="34" charset="0"/>
+                <a:ea typeface="Verdana" pitchFamily="34" charset="-122"/>
+                <a:cs typeface="Verdana" pitchFamily="34" charset="-120"/>
+              </a:rPr>
+              <a:t>Sleep</a:t>
+            </a:r>
+            <a:endParaRPr lang="en-US" sz="1200" dirty="0"/>
+          </a:p>
+        </p:txBody>
+      </p:sp>
+      <p:sp>
+        <p:nvSpPr>
+          <p:cNvPr id="6" name="Text 4"/>
           <p:cNvSpPr/>
           <p:nvPr/>
         </p:nvSpPr>
@@ -3658,7 +4281,7 @@
                 <a:ea typeface="Georgia" pitchFamily="34" charset="-122"/>
                 <a:cs typeface="Georgia" pitchFamily="34" charset="-120"/>
               </a:rPr>
-              <a:t>Differentiation</a:t>
+              <a:t>Show + chant (5 min)</a:t>
             </a:r>
             <a:endParaRPr lang="en-US" sz="1800" dirty="0"/>
           </a:p>
@@ -3696,7 +4319,7 @@
               <a:buChar char="•"/>
             </a:pPr>
             <a:r>
-              <a:rPr lang="en-US" sz="1200" b="1" dirty="0">
+              <a:rPr lang="en-US" sz="1200" dirty="0">
                 <a:solidFill>
                   <a:srgbClr val="2C2C2C"/>
                 </a:solidFill>
@@ -3704,16 +4327,20 @@
                 <a:ea typeface="Verdana" pitchFamily="34" charset="-122"/>
                 <a:cs typeface="Verdana" pitchFamily="34" charset="-120"/>
               </a:rPr>
-              <a:t>Tier up:</a:t>
-            </a:r>
-            <a:pPr algn="l" indent="0" marL="0">
+              <a:t>2 children share their drawings.</a:t>
+            </a:r>
+            <a:endParaRPr lang="en-US" sz="1200" dirty="0"/>
+          </a:p>
+          <a:p>
+            <a:pPr algn="l" marL="342900" indent="-342900">
               <a:lnSpc>
                 <a:spcPts val="1620"/>
               </a:lnSpc>
               <a:spcAft>
                 <a:spcPts val="300"/>
               </a:spcAft>
-              <a:buNone/>
+              <a:buSzPct val="100000"/>
+              <a:buChar char="•"/>
             </a:pPr>
             <a:r>
               <a:rPr lang="en-US" sz="1200" dirty="0">
@@ -3724,51 +4351,7 @@
                 <a:ea typeface="Verdana" pitchFamily="34" charset="-122"/>
                 <a:cs typeface="Verdana" pitchFamily="34" charset="-120"/>
               </a:rPr>
-              <a:t> Try 2 bedtime rules.</a:t>
-            </a:r>
-            <a:endParaRPr lang="en-US" sz="1200" dirty="0"/>
-          </a:p>
-          <a:p>
-            <a:pPr algn="l" marL="342900" indent="-342900">
-              <a:lnSpc>
-                <a:spcPts val="1620"/>
-              </a:lnSpc>
-              <a:spcAft>
-                <a:spcPts val="300"/>
-              </a:spcAft>
-              <a:buSzPct val="100000"/>
-              <a:buChar char="•"/>
-            </a:pPr>
-            <a:r>
-              <a:rPr lang="en-US" sz="1200" b="1" dirty="0">
-                <a:solidFill>
-                  <a:srgbClr val="2C2C2C"/>
-                </a:solidFill>
-                <a:latin typeface="Verdana" pitchFamily="34" charset="0"/>
-                <a:ea typeface="Verdana" pitchFamily="34" charset="-122"/>
-                <a:cs typeface="Verdana" pitchFamily="34" charset="-120"/>
-              </a:rPr>
-              <a:t>Tier down:</a:t>
-            </a:r>
-            <a:pPr algn="l" indent="0" marL="0">
-              <a:lnSpc>
-                <a:spcPts val="1620"/>
-              </a:lnSpc>
-              <a:spcAft>
-                <a:spcPts val="300"/>
-              </a:spcAft>
-              <a:buNone/>
-            </a:pPr>
-            <a:r>
-              <a:rPr lang="en-US" sz="1200" dirty="0">
-                <a:solidFill>
-                  <a:srgbClr val="2C2C2C"/>
-                </a:solidFill>
-                <a:latin typeface="Verdana" pitchFamily="34" charset="0"/>
-                <a:ea typeface="Verdana" pitchFamily="34" charset="-122"/>
-                <a:cs typeface="Verdana" pitchFamily="34" charset="-120"/>
-              </a:rPr>
-              <a:t> Just remember: sleep at the same time, before 10pm.</a:t>
+              <a:t>Chant + song.</a:t>
             </a:r>
             <a:endParaRPr lang="en-US" sz="1200" dirty="0"/>
           </a:p>
